--- a/output/LINK. standaardpilot.pptx
+++ b/output/LINK. standaardpilot.pptx
@@ -3999,7 +3999,7 @@
                 <a:ea typeface="Arial" pitchFamily="34" charset="-122"/>
                 <a:cs typeface="Arial" pitchFamily="34" charset="-120"/>
               </a:rPr>
-              <a:t>Twaalf weken dagelijks bellen en mailen</a:t>
+              <a:t>Volledige inrichting van belsysteem en nummer</a:t>
             </a:r>
             <a:endParaRPr lang="en-US" sz="900" dirty="0"/>
           </a:p>
@@ -4062,7 +4062,7 @@
                 <a:ea typeface="Arial" pitchFamily="34" charset="-122"/>
                 <a:cs typeface="Arial" pitchFamily="34" charset="-120"/>
               </a:rPr>
-              <a:t>Rapportage elke week, evaluatie om de week</a:t>
+              <a:t>Twaalf weken dagelijks bellen en mailen</a:t>
             </a:r>
             <a:endParaRPr lang="en-US" sz="900" dirty="0"/>
           </a:p>
@@ -4125,7 +4125,7 @@
                 <a:ea typeface="Arial" pitchFamily="34" charset="-122"/>
                 <a:cs typeface="Arial" pitchFamily="34" charset="-120"/>
               </a:rPr>
-              <a:t>Tien gekwalificeerde afspraken, € 495 per afspraak</a:t>
+              <a:t>Rapportage elke week, evaluatie om de week</a:t>
             </a:r>
             <a:endParaRPr lang="en-US" sz="900" dirty="0"/>
           </a:p>
@@ -4188,7 +4188,7 @@
                 <a:ea typeface="Arial" pitchFamily="34" charset="-122"/>
                 <a:cs typeface="Arial" pitchFamily="34" charset="-120"/>
               </a:rPr>
-              <a:t>Eindrapport met marktinzicht en advies</a:t>
+              <a:t>Tien gekwalificeerde afspraken</a:t>
             </a:r>
             <a:endParaRPr lang="en-US" sz="900" dirty="0"/>
           </a:p>

--- a/output/LINK. standaardpilot.pptx
+++ b/output/LINK. standaardpilot.pptx
@@ -1896,7 +1896,7 @@
                 <a:ea typeface="Arial" pitchFamily="34" charset="-122"/>
                 <a:cs typeface="Arial" pitchFamily="34" charset="-120"/>
               </a:rPr>
-              <a:t>De standaardpilot van LINK.: twaalf weken bellen en mailen en tien gekwalificeerde afspraken in jullie agenda. Alles inbegrepen, € 4.950 excl. btw.</a:t>
+              <a:t>De standaardpilot van LINK.: twaalf weken bellen en tien gekwalificeerde afspraken in jullie agenda. Alles inbegrepen, € 4.950 excl. btw.</a:t>
             </a:r>
             <a:endParaRPr lang="en-US" sz="1400" dirty="0"/>
           </a:p>
@@ -2621,7 +2621,7 @@
                 <a:ea typeface="Arial" pitchFamily="34" charset="-122"/>
                 <a:cs typeface="Arial" pitchFamily="34" charset="-120"/>
               </a:rPr>
-              <a:t>Tien gekwalificeerde afspraken in jullie agenda bewijzen dat koude acquisitie voor jullie werkt, met cijfers in plaats van aannames.</a:t>
+              <a:t>Tien gekwalificeerde afspraken in jullie agenda laten zien wat koude acquisitie jullie oplevert. Niet op gevoel, maar geteld.</a:t>
             </a:r>
             <a:endParaRPr lang="en-US" sz="1050" dirty="0"/>
           </a:p>
@@ -2680,7 +2680,7 @@
                 <a:ea typeface="Arial" pitchFamily="34" charset="-122"/>
                 <a:cs typeface="Arial" pitchFamily="34" charset="-120"/>
               </a:rPr>
-              <a:t>Na twaalf weken ligt er een eerlijk beeld en een advies. Jullie beslissen op resultaat of we structureel doorgaan.</a:t>
+              <a:t>Na twaalf weken ligt er een eerlijk beeld en een advies. Jullie beslissen op resultaat of we doorgaan.</a:t>
             </a:r>
             <a:endParaRPr lang="en-US" sz="1200" dirty="0"/>
           </a:p>
@@ -3088,7 +3088,7 @@
                 <a:ea typeface="Arial" pitchFamily="34" charset="-122"/>
                 <a:cs typeface="Arial" pitchFamily="34" charset="-120"/>
               </a:rPr>
-              <a:t>Propositie en strategie</a:t>
+              <a:t>Kick-off en belscript</a:t>
             </a:r>
             <a:endParaRPr lang="en-US" sz="1150" dirty="0"/>
           </a:p>
@@ -3130,7 +3130,7 @@
                 <a:ea typeface="Arial" pitchFamily="34" charset="-122"/>
                 <a:cs typeface="Arial" pitchFamily="34" charset="-120"/>
               </a:rPr>
-              <a:t>Samen scherp in de kick-off: doelgroep, beslisser, boodschap en bezwaren. Wij schrijven het belscript en de mails, jullie keuren goed.</a:t>
+              <a:t>Samen scherp wat we gaan vertellen en bij wie. Wij schrijven het belscript, jullie keuren het goed.</a:t>
             </a:r>
             <a:endParaRPr lang="en-US" sz="875" dirty="0"/>
           </a:p>
@@ -3302,7 +3302,7 @@
                 <a:ea typeface="Arial" pitchFamily="34" charset="-122"/>
                 <a:cs typeface="Arial" pitchFamily="34" charset="-120"/>
               </a:rPr>
-              <a:t>Wij bouwen de bellijst op jullie ideale klantprofiel: branche, grootte, regio en functie. Bestaande relaties en uitsluitingen halen we er vooraf uit.</a:t>
+              <a:t>Wij bouwen de bellijst op jullie ideale klant: branche, grootte, regio en functie. Bestaande relaties en uitsluitingen gaan er vooraf uit.</a:t>
             </a:r>
             <a:endParaRPr lang="en-US" sz="875" dirty="0"/>
           </a:p>
@@ -3432,7 +3432,7 @@
                 <a:ea typeface="Arial" pitchFamily="34" charset="-122"/>
                 <a:cs typeface="Arial" pitchFamily="34" charset="-120"/>
               </a:rPr>
-              <a:t>Twaalf weken uitvoering</a:t>
+              <a:t>Twaalf weken bellen</a:t>
             </a:r>
             <a:endParaRPr lang="en-US" sz="1150" dirty="0"/>
           </a:p>
@@ -3474,7 +3474,7 @@
                 <a:ea typeface="Arial" pitchFamily="34" charset="-122"/>
                 <a:cs typeface="Arial" pitchFamily="34" charset="-120"/>
               </a:rPr>
-              <a:t>Dagelijks bellen met een regionaal nummer op jullie naam, korte persoonlijke mails als opening en opvolging. Rapportage elke week, evaluatie om de week.</a:t>
+              <a:t>Elke werkdag bellen met een regionaal nummer op jullie naam. Elke week een rapportage en om de week zitten we samen om bij te sturen.</a:t>
             </a:r>
             <a:endParaRPr lang="en-US" sz="875" dirty="0"/>
           </a:p>
@@ -3646,7 +3646,7 @@
                 <a:ea typeface="Arial" pitchFamily="34" charset="-122"/>
                 <a:cs typeface="Arial" pitchFamily="34" charset="-120"/>
               </a:rPr>
-              <a:t>Fit: het bedrijf past bij de criteria uit de kick-off. Interesse: er is een concrete aanleiding of vraag. Beslisser: de afspraak staat met wie over de aankoop gaat.</a:t>
+              <a:t>Elke afspraak voldoet aan drie eisen: het bedrijf past, de interesse is echt en de juiste persoon zit aan tafel.</a:t>
             </a:r>
             <a:endParaRPr lang="en-US" sz="875" dirty="0"/>
           </a:p>
@@ -3873,7 +3873,7 @@
                 <a:ea typeface="Arial" pitchFamily="34" charset="-122"/>
                 <a:cs typeface="Arial" pitchFamily="34" charset="-120"/>
               </a:rPr>
-              <a:t>Propositie, belscript en mails</a:t>
+              <a:t>Kick-off en belscript</a:t>
             </a:r>
             <a:endParaRPr lang="en-US" sz="900" dirty="0"/>
           </a:p>
@@ -3936,7 +3936,7 @@
                 <a:ea typeface="Arial" pitchFamily="34" charset="-122"/>
                 <a:cs typeface="Arial" pitchFamily="34" charset="-120"/>
               </a:rPr>
-              <a:t>Bellijst op jullie ideale klantprofiel</a:t>
+              <a:t>Bellijst op jullie ideale klant</a:t>
             </a:r>
             <a:endParaRPr lang="en-US" sz="900" dirty="0"/>
           </a:p>
@@ -4062,7 +4062,7 @@
                 <a:ea typeface="Arial" pitchFamily="34" charset="-122"/>
                 <a:cs typeface="Arial" pitchFamily="34" charset="-120"/>
               </a:rPr>
-              <a:t>Twaalf weken dagelijks bellen en mailen</a:t>
+              <a:t>Twaalf weken elke werkdag bellen</a:t>
             </a:r>
             <a:endParaRPr lang="en-US" sz="900" dirty="0"/>
           </a:p>

--- a/output/LINK. standaardpilot.pptx
+++ b/output/LINK. standaardpilot.pptx
@@ -3474,7 +3474,7 @@
                 <a:ea typeface="Arial" pitchFamily="34" charset="-122"/>
                 <a:cs typeface="Arial" pitchFamily="34" charset="-120"/>
               </a:rPr>
-              <a:t>Elke werkdag bellen met een regionaal nummer op jullie naam. Elke week een rapportage en om de week zitten we samen om bij te sturen.</a:t>
+              <a:t>Elke werkdag bellen met een regionaal nummer op jullie naam. Elke week een rapportage, om de week evaluatie. Gaat het makkelijker of juist moeizamer, dan zitten we eerder om tafel en schakelen we direct.</a:t>
             </a:r>
             <a:endParaRPr lang="en-US" sz="875" dirty="0"/>
           </a:p>

--- a/output/LINK. standaardpilot.pptx
+++ b/output/LINK. standaardpilot.pptx
@@ -3474,7 +3474,7 @@
                 <a:ea typeface="Arial" pitchFamily="34" charset="-122"/>
                 <a:cs typeface="Arial" pitchFamily="34" charset="-120"/>
               </a:rPr>
-              <a:t>Elke werkdag bellen met een regionaal nummer op jullie naam. Elke week een rapportage, om de week evaluatie. Gaat het makkelijker of juist moeizamer, dan zitten we eerder om tafel en schakelen we direct.</a:t>
+              <a:t>We bellen op de dagen en dagdelen die in onze data het beste werken voor jullie branche, met een regionaal nummer op jullie naam. Elke week een rapportage, om de week evaluatie. Gaat het makkelijker of juist moeizamer, dan zitten we eerder om tafel en schakelen we direct.</a:t>
             </a:r>
             <a:endParaRPr lang="en-US" sz="875" dirty="0"/>
           </a:p>
@@ -4062,7 +4062,7 @@
                 <a:ea typeface="Arial" pitchFamily="34" charset="-122"/>
                 <a:cs typeface="Arial" pitchFamily="34" charset="-120"/>
               </a:rPr>
-              <a:t>Twaalf weken elke werkdag bellen</a:t>
+              <a:t>Twaalf weken bellen op de beste momenten</a:t>
             </a:r>
             <a:endParaRPr lang="en-US" sz="900" dirty="0"/>
           </a:p>

--- a/output/LINK. standaardpilot.pptx
+++ b/output/LINK. standaardpilot.pptx
@@ -1896,7 +1896,7 @@
                 <a:ea typeface="Arial" pitchFamily="34" charset="-122"/>
                 <a:cs typeface="Arial" pitchFamily="34" charset="-120"/>
               </a:rPr>
-              <a:t>De standaardpilot van LINK.: twaalf weken bellen en tien gekwalificeerde afspraken in jullie agenda. Alles inbegrepen, € 4.950 excl. btw.</a:t>
+              <a:t>De standaardpilot van LINK.: een looptijd van twaalf weken en tien gekwalificeerde afspraken in jullie agenda. Alles inbegrepen, € 4.950 excl. btw.</a:t>
             </a:r>
             <a:endParaRPr lang="en-US" sz="1400" dirty="0"/>
           </a:p>
@@ -3432,7 +3432,7 @@
                 <a:ea typeface="Arial" pitchFamily="34" charset="-122"/>
                 <a:cs typeface="Arial" pitchFamily="34" charset="-120"/>
               </a:rPr>
-              <a:t>Twaalf weken bellen</a:t>
+              <a:t>Looptijd van twaalf weken</a:t>
             </a:r>
             <a:endParaRPr lang="en-US" sz="1150" dirty="0"/>
           </a:p>
@@ -3474,7 +3474,7 @@
                 <a:ea typeface="Arial" pitchFamily="34" charset="-122"/>
                 <a:cs typeface="Arial" pitchFamily="34" charset="-120"/>
               </a:rPr>
-              <a:t>We bellen op de dagen en dagdelen die in onze data het beste werken voor jullie branche, met een regionaal nummer op jullie naam. Elke week een rapportage, om de week evaluatie. Gaat het makkelijker of juist moeizamer, dan zitten we eerder om tafel en schakelen we direct.</a:t>
+              <a:t>De pilot loopt twaalf weken. We bellen daarin op de dagen en dagdelen die in onze data het beste werken voor jullie branche, met een regionaal nummer op jullie naam. Elke week een rapportage, om de week evaluatie.</a:t>
             </a:r>
             <a:endParaRPr lang="en-US" sz="875" dirty="0"/>
           </a:p>
@@ -4062,7 +4062,7 @@
                 <a:ea typeface="Arial" pitchFamily="34" charset="-122"/>
                 <a:cs typeface="Arial" pitchFamily="34" charset="-120"/>
               </a:rPr>
-              <a:t>Twaalf weken bellen op de beste momenten</a:t>
+              <a:t>Beldagen binnen een looptijd van 12 weken</a:t>
             </a:r>
             <a:endParaRPr lang="en-US" sz="900" dirty="0"/>
           </a:p>

--- a/output/LINK. standaardpilot.pptx
+++ b/output/LINK. standaardpilot.pptx
@@ -3088,7 +3088,7 @@
                 <a:ea typeface="Arial" pitchFamily="34" charset="-122"/>
                 <a:cs typeface="Arial" pitchFamily="34" charset="-120"/>
               </a:rPr>
-              <a:t>Kick-off en belscript</a:t>
+              <a:t>Kick-off en USP's</a:t>
             </a:r>
             <a:endParaRPr lang="en-US" sz="1150" dirty="0"/>
           </a:p>
@@ -3130,7 +3130,7 @@
                 <a:ea typeface="Arial" pitchFamily="34" charset="-122"/>
                 <a:cs typeface="Arial" pitchFamily="34" charset="-120"/>
               </a:rPr>
-              <a:t>Samen scherp wat we gaan vertellen en bij wie. Wij schrijven het belscript, jullie keuren het goed.</a:t>
+              <a:t>Samen scherp wat we gaan vertellen en bij wie. Wij leggen de USP's vast, jullie keuren ze goed.</a:t>
             </a:r>
             <a:endParaRPr lang="en-US" sz="875" dirty="0"/>
           </a:p>
@@ -3849,7 +3849,7 @@
         <p:spPr>
           <a:xfrm>
             <a:off x="3733791" y="5245087"/>
-            <a:ext cx="3555991" cy="215899"/>
+            <a:ext cx="3746491" cy="215899"/>
           </a:xfrm>
           <a:prstGeom prst="rect">
             <a:avLst/>
@@ -3873,7 +3873,7 @@
                 <a:ea typeface="Arial" pitchFamily="34" charset="-122"/>
                 <a:cs typeface="Arial" pitchFamily="34" charset="-120"/>
               </a:rPr>
-              <a:t>Kick-off en belscript</a:t>
+              <a:t>Kick-off en USP's</a:t>
             </a:r>
             <a:endParaRPr lang="en-US" sz="900" dirty="0"/>
           </a:p>
@@ -3895,7 +3895,7 @@
         </p:blipFill>
         <p:spPr>
           <a:xfrm>
-            <a:off x="7340582" y="5276837"/>
+            <a:off x="7556481" y="5276837"/>
             <a:ext cx="127000" cy="127000"/>
           </a:xfrm>
           <a:prstGeom prst="rect">
@@ -3911,8 +3911,8 @@
         </p:nvSpPr>
         <p:spPr>
           <a:xfrm>
-            <a:off x="7543781" y="5245087"/>
-            <a:ext cx="3555991" cy="215899"/>
+            <a:off x="7759681" y="5245087"/>
+            <a:ext cx="3746491" cy="215899"/>
           </a:xfrm>
           <a:prstGeom prst="rect">
             <a:avLst/>
@@ -3975,7 +3975,7 @@
         <p:spPr>
           <a:xfrm>
             <a:off x="3733791" y="5499086"/>
-            <a:ext cx="3555991" cy="215899"/>
+            <a:ext cx="3746491" cy="215899"/>
           </a:xfrm>
           <a:prstGeom prst="rect">
             <a:avLst/>
@@ -4021,7 +4021,7 @@
         </p:blipFill>
         <p:spPr>
           <a:xfrm>
-            <a:off x="7340582" y="5530836"/>
+            <a:off x="7556481" y="5530836"/>
             <a:ext cx="127000" cy="127000"/>
           </a:xfrm>
           <a:prstGeom prst="rect">
@@ -4037,8 +4037,8 @@
         </p:nvSpPr>
         <p:spPr>
           <a:xfrm>
-            <a:off x="7543781" y="5499086"/>
-            <a:ext cx="3555991" cy="215899"/>
+            <a:off x="7759681" y="5499086"/>
+            <a:ext cx="3746491" cy="215899"/>
           </a:xfrm>
           <a:prstGeom prst="rect">
             <a:avLst/>
@@ -4101,7 +4101,7 @@
         <p:spPr>
           <a:xfrm>
             <a:off x="3733791" y="5753086"/>
-            <a:ext cx="3555991" cy="215899"/>
+            <a:ext cx="3746491" cy="215899"/>
           </a:xfrm>
           <a:prstGeom prst="rect">
             <a:avLst/>
@@ -4147,7 +4147,7 @@
         </p:blipFill>
         <p:spPr>
           <a:xfrm>
-            <a:off x="7340582" y="5784836"/>
+            <a:off x="7556481" y="5784836"/>
             <a:ext cx="127000" cy="127000"/>
           </a:xfrm>
           <a:prstGeom prst="rect">
@@ -4163,8 +4163,8 @@
         </p:nvSpPr>
         <p:spPr>
           <a:xfrm>
-            <a:off x="7543781" y="5753086"/>
-            <a:ext cx="3555991" cy="215899"/>
+            <a:off x="7759681" y="5753086"/>
+            <a:ext cx="3746491" cy="215899"/>
           </a:xfrm>
           <a:prstGeom prst="rect">
             <a:avLst/>
